--- a/presentations/16-assembly-meets-c/16-assembly-meets-c-lecture.pptx
+++ b/presentations/16-assembly-meets-c/16-assembly-meets-c-lecture.pptx
@@ -138,7 +138,7 @@
   <p:extLst>
     <p:ext uri="{521415D9-36F7-43E2-AB2F-B90AF26B5E84}">
       <p14:sectionLst xmlns:p14="http://schemas.microsoft.com/office/powerpoint/2010/main">
-        <p14:section name="Opening" id="{d6dfca32-27d6-85ef-6925-eecc5d176a1a}">
+        <p14:section name="Opening" id="{5092e180-9c82-c0a2-1a5c-fda38952b9bd}">
           <p14:sldIdLst>
             <p14:sldId id="256"/>
             <p14:sldId id="257"/>
@@ -151,7 +151,7 @@
             <p14:sldId id="264"/>
           </p14:sldIdLst>
         </p14:section>
-        <p14:section name="What the compiler decides" id="{50866f67-7769-ff2e-4c58-e412f18e526f}">
+        <p14:section name="What the compiler decides" id="{1c53011f-248a-5b0d-45a1-8be4b39707db}">
           <p14:sldIdLst>
             <p14:sldId id="265"/>
             <p14:sldId id="266"/>
@@ -164,7 +164,7 @@
             <p14:sldId id="273"/>
           </p14:sldIdLst>
         </p14:section>
-        <p14:section name="What C hides, and what it does not" id="{ffe308a2-a8f7-45ea-2017-02f6b7c34ed2}">
+        <p14:section name="What C hides, and what it does not" id="{e9c3b465-7c34-4006-d955-1928530749ff}">
           <p14:sldIdLst>
             <p14:sldId id="274"/>
             <p14:sldId id="275"/>
@@ -172,7 +172,7 @@
             <p14:sldId id="277"/>
           </p14:sldIdLst>
         </p14:section>
-        <p14:section name="A side-by-side map" id="{bd5fdbef-a279-56f4-4c23-371f28161bf4}">
+        <p14:section name="A side-by-side map" id="{9becb75f-041e-f9ba-a4ac-1f06d2dc520a}">
           <p14:sldIdLst>
             <p14:sldId id="278"/>
             <p14:sldId id="279"/>
@@ -180,7 +180,7 @@
             <p14:sldId id="281"/>
           </p14:sldIdLst>
         </p14:section>
-        <p14:section name="Where to go next" id="{903e16aa-d122-1276-4cd3-dae758d73fb1}">
+        <p14:section name="Where to go next" id="{d38cfb33-4570-6987-87f3-5e9b68d62a94}">
           <p14:sldIdLst>
             <p14:sldId id="282"/>
             <p14:sldId id="283"/>
@@ -189,7 +189,7 @@
             <p14:sldId id="286"/>
           </p14:sldIdLst>
         </p14:section>
-        <p14:section name="Closing" id="{23744976-49f2-43c3-6bf2-14ced4e0b302}">
+        <p14:section name="Closing" id="{96856c80-f466-27e4-f345-8b71bb8ae15e}">
           <p14:sldIdLst>
             <p14:sldId id="287"/>
           </p14:sldIdLst>
